--- a/dist/sunum/mercekler.pptx
+++ b/dist/sunum/mercekler.pptx
@@ -4671,7 +4671,7 @@
       </p:grpSpPr>
       <p:pic>
         <p:nvPicPr>
-          <p:cNvPr id="2" name="Image 0" descr="/tmp/claude-1000/-opt-dersler/8a8328c3-841c-44fa-b76f-82572d338d3d/scratchpad/d4/sek/mercekler-kapak.jpg">    </p:cNvPr>
+          <p:cNvPr id="2" name="Image 0" descr="/tmp/claude-1000/-opt-dersler/8a8328c3-841c-44fa-b76f-82572d338d3d/scratchpad/d5/sek/mercekler-kapak.jpg">    </p:cNvPr>
           <p:cNvPicPr>
             <a:picLocks noChangeAspect="1"/>
           </p:cNvPicPr>
@@ -5324,69 +5324,6 @@
         </p:nvSpPr>
         <p:spPr>
           <a:xfrm>
-            <a:off x="9448495" y="6309360"/>
-            <a:ext cx="2103120" cy="274320"/>
-          </a:xfrm>
-          <a:prstGeom prst="roundRect">
-            <a:avLst>
-              <a:gd name="adj" fmla="val 50000"/>
-            </a:avLst>
-          </a:prstGeom>
-          <a:solidFill>
-            <a:srgbClr val="0E1426">
-              <a:alpha val="65000"/>
-            </a:srgbClr>
-          </a:solidFill>
-          <a:ln/>
-        </p:spPr>
-      </p:sp>
-      <p:sp>
-        <p:nvSpPr>
-          <p:cNvPr id="22" name="Text 19"/>
-          <p:cNvSpPr txBox="1"/>
-          <p:nvPr/>
-        </p:nvSpPr>
-        <p:spPr>
-          <a:xfrm>
-            <a:off x="9448495" y="6309360"/>
-            <a:ext cx="2103120" cy="274320"/>
-          </a:xfrm>
-          <a:prstGeom prst="rect">
-            <a:avLst/>
-          </a:prstGeom>
-          <a:noFill/>
-          <a:ln/>
-        </p:spPr>
-        <p:txBody>
-          <a:bodyPr wrap="square" lIns="0" tIns="0" rIns="0" bIns="0" rtlCol="0" anchor="ctr"/>
-          <a:lstStyle/>
-          <a:p>
-            <a:pPr algn="ctr" indent="0" marL="0">
-              <a:buNone/>
-            </a:pPr>
-            <a:r>
-              <a:rPr lang="en-US" sz="900" dirty="0">
-                <a:solidFill>
-                  <a:srgbClr val="E4E9F5"/>
-                </a:solidFill>
-                <a:latin typeface="Calibri" pitchFamily="34" charset="0"/>
-                <a:ea typeface="Calibri" pitchFamily="34" charset="-122"/>
-                <a:cs typeface="Calibri" pitchFamily="34" charset="-120"/>
-              </a:rPr>
-              <a:t>Görsel: yapay zekâ ile üretildi</a:t>
-            </a:r>
-            <a:endParaRPr lang="en-US" sz="900" dirty="0"/>
-          </a:p>
-        </p:txBody>
-      </p:sp>
-      <p:sp>
-        <p:nvSpPr>
-          <p:cNvPr id="23" name="Shape 20"/>
-          <p:cNvSpPr/>
-          <p:nvPr/>
-        </p:nvSpPr>
-        <p:spPr>
-          <a:xfrm>
             <a:off x="640080" y="6382512"/>
             <a:ext cx="128016" cy="128016"/>
           </a:xfrm>
@@ -5403,7 +5340,7 @@
       </p:sp>
       <p:sp>
         <p:nvSpPr>
-          <p:cNvPr id="24" name="Text 21"/>
+          <p:cNvPr id="22" name="Text 19"/>
           <p:cNvSpPr txBox="1"/>
           <p:nvPr/>
         </p:nvSpPr>
@@ -7546,7 +7483,7 @@
       </p:sp>
       <p:pic>
         <p:nvPicPr>
-          <p:cNvPr id="14" name="Image 0" descr="/tmp/claude-1000/-opt-dersler/8a8328c3-841c-44fa-b76f-82572d338d3d/scratchpad/d4/sek/mercekler-03.png">    </p:cNvPr>
+          <p:cNvPr id="14" name="Image 0" descr="/tmp/claude-1000/-opt-dersler/8a8328c3-841c-44fa-b76f-82572d338d3d/scratchpad/d5/sek/mercekler-03.png">    </p:cNvPr>
           <p:cNvPicPr>
             <a:picLocks noChangeAspect="1"/>
           </p:cNvPicPr>
@@ -9543,7 +9480,7 @@
       </p:sp>
       <p:pic>
         <p:nvPicPr>
-          <p:cNvPr id="16" name="Image 0" descr="/tmp/claude-1000/-opt-dersler/8a8328c3-841c-44fa-b76f-82572d338d3d/scratchpad/d4/sek/mercekler-04.png">    </p:cNvPr>
+          <p:cNvPr id="16" name="Image 0" descr="/tmp/claude-1000/-opt-dersler/8a8328c3-841c-44fa-b76f-82572d338d3d/scratchpad/d5/sek/mercekler-04.png">    </p:cNvPr>
           <p:cNvPicPr>
             <a:picLocks noChangeAspect="1"/>
           </p:cNvPicPr>
@@ -14851,7 +14788,7 @@
       </p:sp>
       <p:pic>
         <p:nvPicPr>
-          <p:cNvPr id="19" name="Image 0" descr="/tmp/claude-1000/-opt-dersler/8a8328c3-841c-44fa-b76f-82572d338d3d/scratchpad/d4/sek/mercekler-05.png">    </p:cNvPr>
+          <p:cNvPr id="19" name="Image 0" descr="/tmp/claude-1000/-opt-dersler/8a8328c3-841c-44fa-b76f-82572d338d3d/scratchpad/d5/sek/mercekler-05.png">    </p:cNvPr>
           <p:cNvPicPr>
             <a:picLocks noChangeAspect="1"/>
           </p:cNvPicPr>
@@ -15677,7 +15614,7 @@
       </p:sp>
       <p:pic>
         <p:nvPicPr>
-          <p:cNvPr id="11" name="Image 0" descr="/tmp/claude-1000/-opt-dersler/8a8328c3-841c-44fa-b76f-82572d338d3d/scratchpad/d4/sek/mercekler-06.png">    </p:cNvPr>
+          <p:cNvPr id="11" name="Image 0" descr="/tmp/claude-1000/-opt-dersler/8a8328c3-841c-44fa-b76f-82572d338d3d/scratchpad/d5/sek/mercekler-06.png">    </p:cNvPr>
           <p:cNvPicPr>
             <a:picLocks noChangeAspect="1"/>
           </p:cNvPicPr>
@@ -18528,7 +18465,7 @@
       </p:sp>
       <p:pic>
         <p:nvPicPr>
-          <p:cNvPr id="11" name="Image 0" descr="/tmp/claude-1000/-opt-dersler/8a8328c3-841c-44fa-b76f-82572d338d3d/scratchpad/d4/sek/mercekler-uygulama-kart.jpg">    </p:cNvPr>
+          <p:cNvPr id="11" name="Image 0" descr="/tmp/claude-1000/-opt-dersler/8a8328c3-841c-44fa-b76f-82572d338d3d/scratchpad/d5/sek/mercekler-uygulama-kart.jpg">    </p:cNvPr>
           <p:cNvPicPr>
             <a:picLocks noChangeAspect="1"/>
           </p:cNvPicPr>
@@ -18552,70 +18489,7 @@
       </p:pic>
       <p:sp>
         <p:nvSpPr>
-          <p:cNvPr id="12" name="Shape 9"/>
-          <p:cNvSpPr/>
-          <p:nvPr/>
-        </p:nvSpPr>
-        <p:spPr>
-          <a:xfrm>
-            <a:off x="9704527" y="4198925"/>
-            <a:ext cx="1755648" cy="246888"/>
-          </a:xfrm>
-          <a:prstGeom prst="roundRect">
-            <a:avLst>
-              <a:gd name="adj" fmla="val 48148"/>
-            </a:avLst>
-          </a:prstGeom>
-          <a:solidFill>
-            <a:srgbClr val="0E1426">
-              <a:alpha val="60000"/>
-            </a:srgbClr>
-          </a:solidFill>
-          <a:ln/>
-        </p:spPr>
-      </p:sp>
-      <p:sp>
-        <p:nvSpPr>
-          <p:cNvPr id="13" name="Text 10"/>
-          <p:cNvSpPr txBox="1"/>
-          <p:nvPr/>
-        </p:nvSpPr>
-        <p:spPr>
-          <a:xfrm>
-            <a:off x="9704527" y="4198925"/>
-            <a:ext cx="1755648" cy="246888"/>
-          </a:xfrm>
-          <a:prstGeom prst="rect">
-            <a:avLst/>
-          </a:prstGeom>
-          <a:noFill/>
-          <a:ln/>
-        </p:spPr>
-        <p:txBody>
-          <a:bodyPr wrap="square" lIns="0" tIns="0" rIns="0" bIns="0" rtlCol="0" anchor="ctr"/>
-          <a:lstStyle/>
-          <a:p>
-            <a:pPr algn="ctr" indent="0" marL="0">
-              <a:buNone/>
-            </a:pPr>
-            <a:r>
-              <a:rPr lang="en-US" sz="850" dirty="0">
-                <a:solidFill>
-                  <a:srgbClr val="FFFFFF"/>
-                </a:solidFill>
-                <a:latin typeface="Calibri" pitchFamily="34" charset="0"/>
-                <a:ea typeface="Calibri" pitchFamily="34" charset="-122"/>
-                <a:cs typeface="Calibri" pitchFamily="34" charset="-120"/>
-              </a:rPr>
-              <a:t>Yapay zekâ ile üretildi</a:t>
-            </a:r>
-            <a:endParaRPr lang="en-US" sz="850" dirty="0"/>
-          </a:p>
-        </p:txBody>
-      </p:sp>
-      <p:sp>
-        <p:nvSpPr>
-          <p:cNvPr id="14" name="Text 11"/>
+          <p:cNvPr id="12" name="Text 9"/>
           <p:cNvSpPr txBox="1"/>
           <p:nvPr/>
         </p:nvSpPr>
@@ -18674,7 +18548,7 @@
       </p:sp>
       <p:sp>
         <p:nvSpPr>
-          <p:cNvPr id="15" name="Shape 12"/>
+          <p:cNvPr id="13" name="Shape 10"/>
           <p:cNvSpPr/>
           <p:nvPr/>
         </p:nvSpPr>
@@ -18696,7 +18570,7 @@
       </p:sp>
       <p:sp>
         <p:nvSpPr>
-          <p:cNvPr id="16" name="Text 13"/>
+          <p:cNvPr id="14" name="Text 11"/>
           <p:cNvSpPr txBox="1"/>
           <p:nvPr/>
         </p:nvSpPr>
@@ -18735,7 +18609,7 @@
       </p:sp>
       <p:sp>
         <p:nvSpPr>
-          <p:cNvPr id="17" name="Text 14"/>
+          <p:cNvPr id="15" name="Text 12"/>
           <p:cNvSpPr txBox="1"/>
           <p:nvPr/>
         </p:nvSpPr>
@@ -36375,7 +36249,7 @@
       </p:sp>
       <p:pic>
         <p:nvPicPr>
-          <p:cNvPr id="11" name="Image 0" descr="/tmp/claude-1000/-opt-dersler/8a8328c3-841c-44fa-b76f-82572d338d3d/scratchpad/d4/sek/mercekler-gunluk-kart.jpg">    </p:cNvPr>
+          <p:cNvPr id="11" name="Image 0" descr="/tmp/claude-1000/-opt-dersler/8a8328c3-841c-44fa-b76f-82572d338d3d/scratchpad/d5/sek/mercekler-gunluk-kart.jpg">    </p:cNvPr>
           <p:cNvPicPr>
             <a:picLocks noChangeAspect="1"/>
           </p:cNvPicPr>
@@ -36399,70 +36273,7 @@
       </p:pic>
       <p:sp>
         <p:nvSpPr>
-          <p:cNvPr id="12" name="Shape 9"/>
-          <p:cNvSpPr/>
-          <p:nvPr/>
-        </p:nvSpPr>
-        <p:spPr>
-          <a:xfrm>
-            <a:off x="9704527" y="4198925"/>
-            <a:ext cx="1755648" cy="246888"/>
-          </a:xfrm>
-          <a:prstGeom prst="roundRect">
-            <a:avLst>
-              <a:gd name="adj" fmla="val 48148"/>
-            </a:avLst>
-          </a:prstGeom>
-          <a:solidFill>
-            <a:srgbClr val="0E1426">
-              <a:alpha val="60000"/>
-            </a:srgbClr>
-          </a:solidFill>
-          <a:ln/>
-        </p:spPr>
-      </p:sp>
-      <p:sp>
-        <p:nvSpPr>
-          <p:cNvPr id="13" name="Text 10"/>
-          <p:cNvSpPr txBox="1"/>
-          <p:nvPr/>
-        </p:nvSpPr>
-        <p:spPr>
-          <a:xfrm>
-            <a:off x="9704527" y="4198925"/>
-            <a:ext cx="1755648" cy="246888"/>
-          </a:xfrm>
-          <a:prstGeom prst="rect">
-            <a:avLst/>
-          </a:prstGeom>
-          <a:noFill/>
-          <a:ln/>
-        </p:spPr>
-        <p:txBody>
-          <a:bodyPr wrap="square" lIns="0" tIns="0" rIns="0" bIns="0" rtlCol="0" anchor="ctr"/>
-          <a:lstStyle/>
-          <a:p>
-            <a:pPr algn="ctr" indent="0" marL="0">
-              <a:buNone/>
-            </a:pPr>
-            <a:r>
-              <a:rPr lang="en-US" sz="850" dirty="0">
-                <a:solidFill>
-                  <a:srgbClr val="FFFFFF"/>
-                </a:solidFill>
-                <a:latin typeface="Calibri" pitchFamily="34" charset="0"/>
-                <a:ea typeface="Calibri" pitchFamily="34" charset="-122"/>
-                <a:cs typeface="Calibri" pitchFamily="34" charset="-120"/>
-              </a:rPr>
-              <a:t>Yapay zekâ ile üretildi</a:t>
-            </a:r>
-            <a:endParaRPr lang="en-US" sz="850" dirty="0"/>
-          </a:p>
-        </p:txBody>
-      </p:sp>
-      <p:sp>
-        <p:nvSpPr>
-          <p:cNvPr id="14" name="Text 11"/>
+          <p:cNvPr id="12" name="Text 9"/>
           <p:cNvSpPr txBox="1"/>
           <p:nvPr/>
         </p:nvSpPr>
@@ -36521,7 +36332,7 @@
       </p:sp>
       <p:sp>
         <p:nvSpPr>
-          <p:cNvPr id="15" name="Shape 12"/>
+          <p:cNvPr id="13" name="Shape 10"/>
           <p:cNvSpPr/>
           <p:nvPr/>
         </p:nvSpPr>
@@ -36543,7 +36354,7 @@
       </p:sp>
       <p:sp>
         <p:nvSpPr>
-          <p:cNvPr id="16" name="Text 13"/>
+          <p:cNvPr id="14" name="Text 11"/>
           <p:cNvSpPr txBox="1"/>
           <p:nvPr/>
         </p:nvSpPr>
@@ -36582,7 +36393,7 @@
       </p:sp>
       <p:sp>
         <p:nvSpPr>
-          <p:cNvPr id="17" name="Text 14"/>
+          <p:cNvPr id="15" name="Text 12"/>
           <p:cNvSpPr txBox="1"/>
           <p:nvPr/>
         </p:nvSpPr>
@@ -40948,7 +40759,7 @@
       </p:sp>
       <p:pic>
         <p:nvPicPr>
-          <p:cNvPr id="14" name="Image 0" descr="/tmp/claude-1000/-opt-dersler/8a8328c3-841c-44fa-b76f-82572d338d3d/scratchpad/d4/sek/mercekler-01.png">    </p:cNvPr>
+          <p:cNvPr id="14" name="Image 0" descr="/tmp/claude-1000/-opt-dersler/8a8328c3-841c-44fa-b76f-82572d338d3d/scratchpad/d5/sek/mercekler-01.png">    </p:cNvPr>
           <p:cNvPicPr>
             <a:picLocks noChangeAspect="1"/>
           </p:cNvPicPr>
@@ -41770,7 +41581,7 @@
       </p:sp>
       <p:pic>
         <p:nvPicPr>
-          <p:cNvPr id="11" name="Image 0" descr="/tmp/claude-1000/-opt-dersler/8a8328c3-841c-44fa-b76f-82572d338d3d/scratchpad/d4/sek/mercekler-02.png">    </p:cNvPr>
+          <p:cNvPr id="11" name="Image 0" descr="/tmp/claude-1000/-opt-dersler/8a8328c3-841c-44fa-b76f-82572d338d3d/scratchpad/d5/sek/mercekler-02.png">    </p:cNvPr>
           <p:cNvPicPr>
             <a:picLocks noChangeAspect="1"/>
           </p:cNvPicPr>
